--- a/agent-observability-course/10-graphics/slides/section-02.pptx
+++ b/agent-observability-course/10-graphics/slides/section-02.pptx
@@ -6169,7 +6169,7 @@
                 </a:solidFill>
                 <a:latin typeface="Inter"/>
               </a:rPr>
-              <a:t>: 401 passed, offline</a:t>
+              <a:t>: 419 passed, offline</a:t>
             </a:r>
           </a:p>
         </p:txBody>
